--- a/webscrapingproject main File.pptx
+++ b/webscrapingproject main File.pptx
@@ -5,7 +5,7 @@
     <p:sldMasterId id="2147483648" r:id="rId1"/>
   </p:sldMasterIdLst>
   <p:notesMasterIdLst>
-    <p:notesMasterId r:id="rId25"/>
+    <p:notesMasterId r:id="rId23"/>
   </p:notesMasterIdLst>
   <p:sldIdLst>
     <p:sldId id="256" r:id="rId2"/>
@@ -23,35 +23,33 @@
     <p:sldId id="275" r:id="rId14"/>
     <p:sldId id="276" r:id="rId15"/>
     <p:sldId id="262" r:id="rId16"/>
-    <p:sldId id="277" r:id="rId17"/>
-    <p:sldId id="278" r:id="rId18"/>
-    <p:sldId id="279" r:id="rId19"/>
-    <p:sldId id="280" r:id="rId20"/>
-    <p:sldId id="267" r:id="rId21"/>
-    <p:sldId id="268" r:id="rId22"/>
-    <p:sldId id="270" r:id="rId23"/>
-    <p:sldId id="259" r:id="rId24"/>
+    <p:sldId id="278" r:id="rId17"/>
+    <p:sldId id="279" r:id="rId18"/>
+    <p:sldId id="267" r:id="rId19"/>
+    <p:sldId id="268" r:id="rId20"/>
+    <p:sldId id="270" r:id="rId21"/>
+    <p:sldId id="259" r:id="rId22"/>
   </p:sldIdLst>
   <p:sldSz cx="12192000" cy="6858000"/>
   <p:notesSz cx="6858000" cy="9144000"/>
   <p:embeddedFontLst>
     <p:embeddedFont>
       <p:font typeface="Consolas" panose="020B0609020204030204" pitchFamily="49" charset="0"/>
-      <p:regular r:id="rId26"/>
-      <p:bold r:id="rId27"/>
-      <p:italic r:id="rId28"/>
+      <p:regular r:id="rId24"/>
+      <p:bold r:id="rId25"/>
+      <p:italic r:id="rId26"/>
+      <p:boldItalic r:id="rId27"/>
+    </p:embeddedFont>
+    <p:embeddedFont>
+      <p:font typeface="Lato Black" panose="020F0502020204030203" pitchFamily="34" charset="0"/>
+      <p:bold r:id="rId28"/>
       <p:boldItalic r:id="rId29"/>
     </p:embeddedFont>
     <p:embeddedFont>
-      <p:font typeface="Lato Black" panose="020F0502020204030203" pitchFamily="34" charset="0"/>
-      <p:bold r:id="rId30"/>
-      <p:boldItalic r:id="rId31"/>
-    </p:embeddedFont>
-    <p:embeddedFont>
       <p:font typeface="Libre Baskerville" panose="02000000000000000000" pitchFamily="2" charset="0"/>
-      <p:regular r:id="rId32"/>
-      <p:bold r:id="rId33"/>
-      <p:italic r:id="rId34"/>
+      <p:regular r:id="rId30"/>
+      <p:bold r:id="rId31"/>
+      <p:italic r:id="rId32"/>
     </p:embeddedFont>
   </p:embeddedFontLst>
   <p:defaultTextStyle>
@@ -288,7 +286,7 @@
       <p15:sldGuideLst xmlns:p15="http://schemas.microsoft.com/office/powerpoint/2012/main"/>
     </p:ext>
     <p:ext uri="GoogleSlidesCustomDataVersion2">
-      <go:slidesCustomData xmlns:go="http://customooxmlschemas.google.com/" xmlns:ahyp="http://schemas.microsoft.com/office/drawing/2018/hyperlinkcolor" xmlns:p15="http://schemas.microsoft.com/office/powerpoint/2012/main" xmlns:p14="http://schemas.microsoft.com/office/powerpoint/2010/main" xmlns:com="http://schemas.openxmlformats.org/drawingml/2006/compatibility" xmlns:pvml="urn:schemas-microsoft-com:office:powerpoint" xmlns:v="urn:schemas-microsoft-com:vml" xmlns:o="urn:schemas-microsoft-com:office:office" xmlns:dgm="http://schemas.openxmlformats.org/drawingml/2006/diagram" xmlns:c="http://schemas.openxmlformats.org/drawingml/2006/chart" xmlns:mv="urn:schemas-microsoft-com:mac:vml" xmlns:mc="http://schemas.openxmlformats.org/markup-compatibility/2006" xmlns="" r:id="rId35" roundtripDataSignature="AMtx7mhnFQsu0qTBRZ+C47HNp0tuHCNkog=="/>
+      <go:slidesCustomData xmlns="" xmlns:mc="http://schemas.openxmlformats.org/markup-compatibility/2006" xmlns:mv="urn:schemas-microsoft-com:mac:vml" xmlns:c="http://schemas.openxmlformats.org/drawingml/2006/chart" xmlns:dgm="http://schemas.openxmlformats.org/drawingml/2006/diagram" xmlns:o="urn:schemas-microsoft-com:office:office" xmlns:v="urn:schemas-microsoft-com:vml" xmlns:pvml="urn:schemas-microsoft-com:office:powerpoint" xmlns:com="http://schemas.openxmlformats.org/drawingml/2006/compatibility" xmlns:p14="http://schemas.microsoft.com/office/powerpoint/2010/main" xmlns:p15="http://schemas.microsoft.com/office/powerpoint/2012/main" xmlns:ahyp="http://schemas.microsoft.com/office/drawing/2018/hyperlinkcolor" xmlns:go="http://customooxmlschemas.google.com/" r:id="rId35" roundtripDataSignature="AMtx7mhnFQsu0qTBRZ+C47HNp0tuHCNkog=="/>
     </p:ext>
   </p:extLst>
 </p:presentation>
@@ -11240,7 +11238,7 @@
                 <a:latin typeface="Times New Roman" panose="02020603050405020304" pitchFamily="18" charset="0"/>
                 <a:cs typeface="Times New Roman" panose="02020603050405020304" pitchFamily="18" charset="0"/>
               </a:rPr>
-              <a:t>Exploratory Data Analys	on Rental Properties </a:t>
+              <a:t>Exploratory Data Analys on Rental Properties </a:t>
             </a:r>
           </a:p>
           <a:p>
@@ -11921,8 +11919,8 @@
         </p:blipFill>
         <p:spPr>
           <a:xfrm>
-            <a:off x="279774" y="218493"/>
-            <a:ext cx="11241666" cy="5743395"/>
+            <a:off x="151758" y="358872"/>
+            <a:ext cx="11570850" cy="5911576"/>
           </a:xfrm>
           <a:prstGeom prst="rect">
             <a:avLst/>
@@ -11933,6 +11931,60 @@
           </a:ln>
         </p:spPr>
       </p:pic>
+      <p:sp>
+        <p:nvSpPr>
+          <p:cNvPr id="3" name="TextBox 2">
+            <a:extLst>
+              <a:ext uri="{FF2B5EF4-FFF2-40B4-BE49-F238E27FC236}">
+                <a16:creationId xmlns:a16="http://schemas.microsoft.com/office/drawing/2014/main" id="{1C8F8846-E471-3DAF-29D0-6BFD15651BAB}"/>
+              </a:ext>
+            </a:extLst>
+          </p:cNvPr>
+          <p:cNvSpPr txBox="1"/>
+          <p:nvPr/>
+        </p:nvSpPr>
+        <p:spPr>
+          <a:xfrm>
+            <a:off x="0" y="134864"/>
+            <a:ext cx="12192000" cy="279757"/>
+          </a:xfrm>
+          <a:prstGeom prst="rect">
+            <a:avLst/>
+          </a:prstGeom>
+          <a:noFill/>
+        </p:spPr>
+        <p:txBody>
+          <a:bodyPr wrap="square">
+            <a:spAutoFit/>
+          </a:bodyPr>
+          <a:lstStyle/>
+          <a:p>
+            <a:pPr algn="ctr">
+              <a:lnSpc>
+                <a:spcPts val="1425"/>
+              </a:lnSpc>
+              <a:buNone/>
+            </a:pPr>
+            <a:r>
+              <a:rPr lang="en-US" sz="1600" b="1" dirty="0">
+                <a:solidFill>
+                  <a:schemeClr val="tx1"/>
+                </a:solidFill>
+                <a:effectLst/>
+                <a:latin typeface="+mn-lt"/>
+              </a:rPr>
+              <a:t>Top 5 Least &amp; Most Expensive Locations (Avg Price) – City Wise</a:t>
+            </a:r>
+            <a:endParaRPr lang="en-US" sz="1600" b="0" dirty="0">
+              <a:solidFill>
+                <a:schemeClr val="tx1"/>
+              </a:solidFill>
+              <a:effectLst/>
+              <a:latin typeface="+mn-lt"/>
+            </a:endParaRPr>
+          </a:p>
+        </p:txBody>
+      </p:sp>
     </p:spTree>
     <p:extLst>
       <p:ext uri="{BB962C8B-B14F-4D97-AF65-F5344CB8AC3E}">
@@ -11947,66 +11999,6 @@
 </file>
 
 <file path=ppt/slides/slide16.xml><?xml version="1.0" encoding="utf-8"?>
-<p:sld xmlns:a="http://schemas.openxmlformats.org/drawingml/2006/main" xmlns:r="http://schemas.openxmlformats.org/officeDocument/2006/relationships" xmlns:p="http://schemas.openxmlformats.org/presentationml/2006/main">
-  <p:cSld>
-    <p:spTree>
-      <p:nvGrpSpPr>
-        <p:cNvPr id="1" name=""/>
-        <p:cNvGrpSpPr/>
-        <p:nvPr/>
-      </p:nvGrpSpPr>
-      <p:grpSpPr>
-        <a:xfrm>
-          <a:off x="0" y="0"/>
-          <a:ext cx="0" cy="0"/>
-          <a:chOff x="0" y="0"/>
-          <a:chExt cx="0" cy="0"/>
-        </a:xfrm>
-      </p:grpSpPr>
-      <p:pic>
-        <p:nvPicPr>
-          <p:cNvPr id="3" name="Picture 2">
-            <a:extLst>
-              <a:ext uri="{FF2B5EF4-FFF2-40B4-BE49-F238E27FC236}">
-                <a16:creationId xmlns:a16="http://schemas.microsoft.com/office/drawing/2014/main" id="{F4F358F2-0930-3AB8-D927-BA01A1C13EF7}"/>
-              </a:ext>
-            </a:extLst>
-          </p:cNvPr>
-          <p:cNvPicPr>
-            <a:picLocks noChangeAspect="1"/>
-          </p:cNvPicPr>
-          <p:nvPr/>
-        </p:nvPicPr>
-        <p:blipFill>
-          <a:blip r:embed="rId2"/>
-          <a:stretch>
-            <a:fillRect/>
-          </a:stretch>
-        </p:blipFill>
-        <p:spPr>
-          <a:xfrm>
-            <a:off x="60260" y="0"/>
-            <a:ext cx="12071480" cy="6858000"/>
-          </a:xfrm>
-          <a:prstGeom prst="rect">
-            <a:avLst/>
-          </a:prstGeom>
-        </p:spPr>
-      </p:pic>
-    </p:spTree>
-    <p:extLst>
-      <p:ext uri="{BB962C8B-B14F-4D97-AF65-F5344CB8AC3E}">
-        <p14:creationId xmlns:p14="http://schemas.microsoft.com/office/powerpoint/2010/main" val="239121759"/>
-      </p:ext>
-    </p:extLst>
-  </p:cSld>
-  <p:clrMapOvr>
-    <a:masterClrMapping/>
-  </p:clrMapOvr>
-</p:sld>
-</file>
-
-<file path=ppt/slides/slide17.xml><?xml version="1.0" encoding="utf-8"?>
 <p:sld xmlns:a="http://schemas.openxmlformats.org/drawingml/2006/main" xmlns:r="http://schemas.openxmlformats.org/officeDocument/2006/relationships" xmlns:p="http://schemas.openxmlformats.org/presentationml/2006/main">
   <p:cSld>
     <p:spTree>
@@ -12045,7 +12037,7 @@
         </p:blipFill>
         <p:spPr>
           <a:xfrm>
-            <a:off x="682741" y="763518"/>
+            <a:off x="682741" y="909822"/>
             <a:ext cx="10826517" cy="5330963"/>
           </a:xfrm>
           <a:prstGeom prst="rect">
@@ -12053,6 +12045,84 @@
           </a:prstGeom>
         </p:spPr>
       </p:pic>
+      <p:sp>
+        <p:nvSpPr>
+          <p:cNvPr id="4" name="TextBox 3">
+            <a:extLst>
+              <a:ext uri="{FF2B5EF4-FFF2-40B4-BE49-F238E27FC236}">
+                <a16:creationId xmlns:a16="http://schemas.microsoft.com/office/drawing/2014/main" id="{EFDF8A08-61AF-EAAE-9C30-B276EB11A1E9}"/>
+              </a:ext>
+            </a:extLst>
+          </p:cNvPr>
+          <p:cNvSpPr txBox="1"/>
+          <p:nvPr/>
+        </p:nvSpPr>
+        <p:spPr>
+          <a:xfrm>
+            <a:off x="73152" y="570081"/>
+            <a:ext cx="12118848" cy="679481"/>
+          </a:xfrm>
+          <a:prstGeom prst="rect">
+            <a:avLst/>
+          </a:prstGeom>
+          <a:noFill/>
+        </p:spPr>
+        <p:txBody>
+          <a:bodyPr wrap="square">
+            <a:spAutoFit/>
+          </a:bodyPr>
+          <a:lstStyle/>
+          <a:p>
+            <a:pPr algn="ctr">
+              <a:lnSpc>
+                <a:spcPts val="1425"/>
+              </a:lnSpc>
+              <a:buNone/>
+            </a:pPr>
+            <a:r>
+              <a:rPr lang="en-GB" sz="3200" b="1" dirty="0">
+                <a:solidFill>
+                  <a:schemeClr val="tx1"/>
+                </a:solidFill>
+                <a:effectLst/>
+                <a:latin typeface="+mj-lt"/>
+              </a:rPr>
+              <a:t> Property Availability Status Analysis</a:t>
+            </a:r>
+            <a:endParaRPr lang="en-GB" sz="3200" b="0" dirty="0">
+              <a:solidFill>
+                <a:schemeClr val="tx1"/>
+              </a:solidFill>
+              <a:effectLst/>
+              <a:latin typeface="+mj-lt"/>
+            </a:endParaRPr>
+          </a:p>
+          <a:p>
+            <a:pPr algn="ctr">
+              <a:lnSpc>
+                <a:spcPts val="1425"/>
+              </a:lnSpc>
+              <a:buNone/>
+            </a:pPr>
+            <a:br>
+              <a:rPr lang="en-GB" sz="3200" b="0" dirty="0">
+                <a:solidFill>
+                  <a:schemeClr val="tx1"/>
+                </a:solidFill>
+                <a:effectLst/>
+                <a:latin typeface="+mj-lt"/>
+              </a:rPr>
+            </a:br>
+            <a:endParaRPr lang="en-GB" sz="3200" b="0" dirty="0">
+              <a:solidFill>
+                <a:schemeClr val="tx1"/>
+              </a:solidFill>
+              <a:effectLst/>
+              <a:latin typeface="+mj-lt"/>
+            </a:endParaRPr>
+          </a:p>
+        </p:txBody>
+      </p:sp>
     </p:spTree>
     <p:extLst>
       <p:ext uri="{BB962C8B-B14F-4D97-AF65-F5344CB8AC3E}">
@@ -12066,7 +12136,7 @@
 </p:sld>
 </file>
 
-<file path=ppt/slides/slide18.xml><?xml version="1.0" encoding="utf-8"?>
+<file path=ppt/slides/slide17.xml><?xml version="1.0" encoding="utf-8"?>
 <p:sld xmlns:a="http://schemas.openxmlformats.org/drawingml/2006/main" xmlns:r="http://schemas.openxmlformats.org/officeDocument/2006/relationships" xmlns:p="http://schemas.openxmlformats.org/presentationml/2006/main">
   <p:cSld>
     <p:spTree>
@@ -12105,18 +12175,389 @@
         </p:blipFill>
         <p:spPr>
           <a:xfrm>
-            <a:off x="0" y="1181484"/>
-            <a:ext cx="12192000" cy="4495031"/>
+            <a:off x="82296" y="1364364"/>
+            <a:ext cx="12109704" cy="4495031"/>
           </a:xfrm>
           <a:prstGeom prst="rect">
             <a:avLst/>
           </a:prstGeom>
         </p:spPr>
       </p:pic>
+      <p:sp>
+        <p:nvSpPr>
+          <p:cNvPr id="4" name="TextBox 3">
+            <a:extLst>
+              <a:ext uri="{FF2B5EF4-FFF2-40B4-BE49-F238E27FC236}">
+                <a16:creationId xmlns:a16="http://schemas.microsoft.com/office/drawing/2014/main" id="{852CA065-443F-EC3E-72F3-1ABC6BA890DD}"/>
+              </a:ext>
+            </a:extLst>
+          </p:cNvPr>
+          <p:cNvSpPr txBox="1"/>
+          <p:nvPr/>
+        </p:nvSpPr>
+        <p:spPr>
+          <a:xfrm>
+            <a:off x="158496" y="366381"/>
+            <a:ext cx="12033504" cy="632224"/>
+          </a:xfrm>
+          <a:prstGeom prst="rect">
+            <a:avLst/>
+          </a:prstGeom>
+          <a:noFill/>
+        </p:spPr>
+        <p:txBody>
+          <a:bodyPr wrap="square">
+            <a:spAutoFit/>
+          </a:bodyPr>
+          <a:lstStyle/>
+          <a:p>
+            <a:pPr algn="ctr">
+              <a:lnSpc>
+                <a:spcPts val="1425"/>
+              </a:lnSpc>
+              <a:buNone/>
+            </a:pPr>
+            <a:r>
+              <a:rPr lang="en-US" b="1" dirty="0">
+                <a:solidFill>
+                  <a:srgbClr val="569CD6"/>
+                </a:solidFill>
+                <a:effectLst/>
+                <a:latin typeface="Consolas" panose="020B0609020204030204" pitchFamily="49" charset="0"/>
+              </a:rPr>
+              <a:t> </a:t>
+            </a:r>
+            <a:r>
+              <a:rPr lang="en-US" sz="3200" b="1" dirty="0">
+                <a:solidFill>
+                  <a:schemeClr val="tx1"/>
+                </a:solidFill>
+                <a:latin typeface="+mj-lt"/>
+              </a:rPr>
+              <a:t>Price per Square Foot Analysis</a:t>
+            </a:r>
+          </a:p>
+          <a:p>
+            <a:pPr algn="ctr">
+              <a:lnSpc>
+                <a:spcPts val="1425"/>
+              </a:lnSpc>
+              <a:buNone/>
+            </a:pPr>
+            <a:br>
+              <a:rPr lang="en-US" b="0" dirty="0">
+                <a:solidFill>
+                  <a:srgbClr val="CCCCCC"/>
+                </a:solidFill>
+                <a:effectLst/>
+                <a:latin typeface="Consolas" panose="020B0609020204030204" pitchFamily="49" charset="0"/>
+              </a:rPr>
+            </a:br>
+            <a:endParaRPr lang="en-US" b="0" dirty="0">
+              <a:solidFill>
+                <a:srgbClr val="CCCCCC"/>
+              </a:solidFill>
+              <a:effectLst/>
+              <a:latin typeface="Consolas" panose="020B0609020204030204" pitchFamily="49" charset="0"/>
+            </a:endParaRPr>
+          </a:p>
+        </p:txBody>
+      </p:sp>
     </p:spTree>
     <p:extLst>
       <p:ext uri="{BB962C8B-B14F-4D97-AF65-F5344CB8AC3E}">
         <p14:creationId xmlns:p14="http://schemas.microsoft.com/office/powerpoint/2010/main" val="1376215811"/>
+      </p:ext>
+    </p:extLst>
+  </p:cSld>
+  <p:clrMapOvr>
+    <a:masterClrMapping/>
+  </p:clrMapOvr>
+</p:sld>
+</file>
+
+<file path=ppt/slides/slide18.xml><?xml version="1.0" encoding="utf-8"?>
+<p:sld xmlns:a="http://schemas.openxmlformats.org/drawingml/2006/main" xmlns:r="http://schemas.openxmlformats.org/officeDocument/2006/relationships" xmlns:p="http://schemas.openxmlformats.org/presentationml/2006/main">
+  <p:cSld>
+    <p:spTree>
+      <p:nvGrpSpPr>
+        <p:cNvPr id="1" name=""/>
+        <p:cNvGrpSpPr/>
+        <p:nvPr/>
+      </p:nvGrpSpPr>
+      <p:grpSpPr>
+        <a:xfrm>
+          <a:off x="0" y="0"/>
+          <a:ext cx="0" cy="0"/>
+          <a:chOff x="0" y="0"/>
+          <a:chExt cx="0" cy="0"/>
+        </a:xfrm>
+      </p:grpSpPr>
+      <p:sp>
+        <p:nvSpPr>
+          <p:cNvPr id="2" name="Title 1">
+            <a:extLst>
+              <a:ext uri="{FF2B5EF4-FFF2-40B4-BE49-F238E27FC236}">
+                <a16:creationId xmlns:a16="http://schemas.microsoft.com/office/drawing/2014/main" id="{FA68939D-7835-4D4B-42C8-27566F4A0380}"/>
+              </a:ext>
+            </a:extLst>
+          </p:cNvPr>
+          <p:cNvSpPr>
+            <a:spLocks noGrp="1"/>
+          </p:cNvSpPr>
+          <p:nvPr>
+            <p:ph type="title"/>
+          </p:nvPr>
+        </p:nvSpPr>
+        <p:spPr/>
+        <p:txBody>
+          <a:bodyPr>
+            <a:normAutofit/>
+          </a:bodyPr>
+          <a:lstStyle/>
+          <a:p>
+            <a:r>
+              <a:rPr lang="en-US" sz="2000" b="1" dirty="0">
+                <a:solidFill>
+                  <a:schemeClr val="accent1"/>
+                </a:solidFill>
+              </a:rPr>
+              <a:t>                                                                                   </a:t>
+            </a:r>
+            <a:r>
+              <a:rPr lang="en-US" sz="2000" b="1" dirty="0">
+                <a:solidFill>
+                  <a:schemeClr val="accent1"/>
+                </a:solidFill>
+                <a:latin typeface="Times New Roman" panose="02020603050405020304" pitchFamily="18" charset="0"/>
+                <a:cs typeface="Times New Roman" panose="02020603050405020304" pitchFamily="18" charset="0"/>
+              </a:rPr>
+              <a:t>Conclusion</a:t>
+            </a:r>
+            <a:endParaRPr lang="en-IN" sz="2000" b="1" dirty="0">
+              <a:solidFill>
+                <a:schemeClr val="accent1"/>
+              </a:solidFill>
+              <a:latin typeface="Times New Roman" panose="02020603050405020304" pitchFamily="18" charset="0"/>
+              <a:cs typeface="Times New Roman" panose="02020603050405020304" pitchFamily="18" charset="0"/>
+            </a:endParaRPr>
+          </a:p>
+        </p:txBody>
+      </p:sp>
+      <p:sp>
+        <p:nvSpPr>
+          <p:cNvPr id="4" name="Text Placeholder 3">
+            <a:extLst>
+              <a:ext uri="{FF2B5EF4-FFF2-40B4-BE49-F238E27FC236}">
+                <a16:creationId xmlns:a16="http://schemas.microsoft.com/office/drawing/2014/main" id="{902FEA5E-0F83-6466-A021-7BC90D13B305}"/>
+              </a:ext>
+            </a:extLst>
+          </p:cNvPr>
+          <p:cNvSpPr txBox="1">
+            <a:spLocks noGrp="1"/>
+          </p:cNvSpPr>
+          <p:nvPr>
+            <p:ph type="body" idx="1"/>
+          </p:nvPr>
+        </p:nvSpPr>
+        <p:spPr>
+          <a:xfrm>
+            <a:off x="374667" y="594360"/>
+            <a:ext cx="10515600" cy="7565108"/>
+          </a:xfrm>
+          <a:prstGeom prst="rect">
+            <a:avLst/>
+          </a:prstGeom>
+          <a:noFill/>
+        </p:spPr>
+        <p:txBody>
+          <a:bodyPr wrap="square">
+            <a:spAutoFit/>
+          </a:bodyPr>
+          <a:lstStyle/>
+          <a:p>
+            <a:pPr marL="108000">
+              <a:spcAft>
+                <a:spcPts val="1200"/>
+              </a:spcAft>
+              <a:defRPr sz="1800" b="1"/>
+            </a:pPr>
+            <a:endParaRPr sz="1400" dirty="0"/>
+          </a:p>
+          <a:p>
+            <a:pPr marL="108000">
+              <a:spcAft>
+                <a:spcPts val="1200"/>
+              </a:spcAft>
+              <a:defRPr sz="1800" b="1"/>
+            </a:pPr>
+            <a:r>
+              <a:rPr sz="1600" dirty="0"/>
+              <a:t>🏆 Most Expensive City: Mumbai (₹82,709 avg)</a:t>
+            </a:r>
+          </a:p>
+          <a:p>
+            <a:pPr marL="108000">
+              <a:spcAft>
+                <a:spcPts val="1200"/>
+              </a:spcAft>
+              <a:defRPr sz="1800" b="1"/>
+            </a:pPr>
+            <a:r>
+              <a:rPr sz="1600" dirty="0"/>
+              <a:t>💰 Most Affordable City: Pune (₹39,082 avg)</a:t>
+            </a:r>
+          </a:p>
+          <a:p>
+            <a:pPr marL="108000">
+              <a:spcAft>
+                <a:spcPts val="1200"/>
+              </a:spcAft>
+              <a:defRPr sz="1800" b="1"/>
+            </a:pPr>
+            <a:r>
+              <a:rPr sz="1600" dirty="0"/>
+              <a:t>🏠 Most Popular Configuration: 3 BHK (589 properties)</a:t>
+            </a:r>
+          </a:p>
+          <a:p>
+            <a:pPr marL="108000">
+              <a:spcAft>
+                <a:spcPts val="1200"/>
+              </a:spcAft>
+              <a:defRPr sz="1800" b="1"/>
+            </a:pPr>
+            <a:r>
+              <a:rPr sz="1600" dirty="0"/>
+              <a:t>🛋️ Preferred Furnishing: Semi-Furnished (755 properties)</a:t>
+            </a:r>
+          </a:p>
+          <a:p>
+            <a:pPr marL="108000">
+              <a:spcAft>
+                <a:spcPts val="1200"/>
+              </a:spcAft>
+              <a:defRPr sz="1800" b="1"/>
+            </a:pPr>
+            <a:r>
+              <a:rPr sz="1600" dirty="0"/>
+              <a:t>📊 Average Price per </a:t>
+            </a:r>
+            <a:r>
+              <a:rPr sz="1600" dirty="0" err="1"/>
+              <a:t>Sqft</a:t>
+            </a:r>
+            <a:r>
+              <a:rPr sz="1600" dirty="0"/>
+              <a:t>: ₹49.80</a:t>
+            </a:r>
+          </a:p>
+          <a:p>
+            <a:pPr marL="108000">
+              <a:spcAft>
+                <a:spcPts val="1200"/>
+              </a:spcAft>
+              <a:defRPr sz="1800" b="1"/>
+            </a:pPr>
+            <a:r>
+              <a:rPr sz="1600" dirty="0"/>
+              <a:t>👥 Tenant Preference: Bachelors/Family is most common</a:t>
+            </a:r>
+          </a:p>
+          <a:p>
+            <a:pPr marL="108000">
+              <a:spcAft>
+                <a:spcPts val="1200"/>
+              </a:spcAft>
+              <a:defRPr sz="1800" b="1"/>
+            </a:pPr>
+            <a:r>
+              <a:rPr sz="1600" dirty="0"/>
+              <a:t>🏢 Property Type: Flat dominates the market (1058 properties)</a:t>
+            </a:r>
+            <a:endParaRPr lang="en-US" sz="1600" dirty="0"/>
+          </a:p>
+          <a:p>
+            <a:pPr marL="108000">
+              <a:spcAft>
+                <a:spcPts val="1200"/>
+              </a:spcAft>
+              <a:defRPr sz="1800" b="1"/>
+            </a:pPr>
+            <a:r>
+              <a:rPr lang="en-US" sz="1600" dirty="0"/>
+              <a:t>Strong correlation between area, BHK, and rental price</a:t>
+            </a:r>
+          </a:p>
+          <a:p>
+            <a:pPr marL="108000">
+              <a:spcAft>
+                <a:spcPts val="1200"/>
+              </a:spcAft>
+              <a:defRPr sz="1800" b="1"/>
+            </a:pPr>
+            <a:r>
+              <a:rPr lang="en-US" sz="1600" dirty="0"/>
+              <a:t>Significant price variations observed between cities and configurations</a:t>
+            </a:r>
+          </a:p>
+          <a:p>
+            <a:pPr marL="108000">
+              <a:spcAft>
+                <a:spcPts val="1200"/>
+              </a:spcAft>
+              <a:defRPr sz="1800" b="1"/>
+            </a:pPr>
+            <a:r>
+              <a:rPr lang="en-US" sz="1600" dirty="0"/>
+              <a:t>Market shows clear preferences for certain furnishing types</a:t>
+            </a:r>
+          </a:p>
+          <a:p>
+            <a:pPr marL="108000">
+              <a:spcAft>
+                <a:spcPts val="1200"/>
+              </a:spcAft>
+              <a:defRPr sz="1800" b="1"/>
+            </a:pPr>
+            <a:r>
+              <a:rPr lang="en-US" sz="1600" dirty="0"/>
+              <a:t>Data-driven insights can help both landlords and tenants make informed decisions</a:t>
+            </a:r>
+          </a:p>
+          <a:p>
+            <a:pPr marL="108000">
+              <a:spcAft>
+                <a:spcPts val="1200"/>
+              </a:spcAft>
+              <a:defRPr sz="1800" b="1"/>
+            </a:pPr>
+            <a:endParaRPr lang="en-US" sz="1600" dirty="0"/>
+          </a:p>
+          <a:p>
+            <a:pPr marL="108000">
+              <a:spcAft>
+                <a:spcPts val="1200"/>
+              </a:spcAft>
+              <a:defRPr sz="1800" b="1"/>
+            </a:pPr>
+            <a:endParaRPr lang="en-US" sz="1400" dirty="0"/>
+          </a:p>
+          <a:p>
+            <a:pPr marL="108000">
+              <a:spcAft>
+                <a:spcPts val="1200"/>
+              </a:spcAft>
+              <a:defRPr sz="1800" b="1"/>
+            </a:pPr>
+            <a:endParaRPr lang="en-US" sz="1400" dirty="0"/>
+          </a:p>
+        </p:txBody>
+      </p:sp>
+    </p:spTree>
+    <p:extLst>
+      <p:ext uri="{BB962C8B-B14F-4D97-AF65-F5344CB8AC3E}">
+        <p14:creationId xmlns:p14="http://schemas.microsoft.com/office/powerpoint/2010/main" val="2582021120"/>
       </p:ext>
     </p:extLst>
   </p:cSld>
@@ -12143,40 +12584,103 @@
           <a:chExt cx="0" cy="0"/>
         </a:xfrm>
       </p:grpSpPr>
-      <p:pic>
-        <p:nvPicPr>
-          <p:cNvPr id="3" name="Picture 2">
+      <p:sp>
+        <p:nvSpPr>
+          <p:cNvPr id="2" name="Title 1">
             <a:extLst>
               <a:ext uri="{FF2B5EF4-FFF2-40B4-BE49-F238E27FC236}">
-                <a16:creationId xmlns:a16="http://schemas.microsoft.com/office/drawing/2014/main" id="{B45DDFCE-FBFE-AC7D-445A-2FBB50BB60CA}"/>
+                <a16:creationId xmlns:a16="http://schemas.microsoft.com/office/drawing/2014/main" id="{3FA2FBE7-F43D-C2BE-42F7-9B4DAC3D4C97}"/>
               </a:ext>
             </a:extLst>
           </p:cNvPr>
-          <p:cNvPicPr>
-            <a:picLocks noChangeAspect="1"/>
-          </p:cNvPicPr>
+          <p:cNvSpPr>
+            <a:spLocks noGrp="1"/>
+          </p:cNvSpPr>
+          <p:nvPr>
+            <p:ph type="title"/>
+          </p:nvPr>
+        </p:nvSpPr>
+        <p:spPr/>
+        <p:txBody>
+          <a:bodyPr>
+            <a:normAutofit/>
+          </a:bodyPr>
+          <a:lstStyle/>
+          <a:p>
+            <a:r>
+              <a:rPr lang="en-US" sz="2000" b="1" dirty="0"/>
+              <a:t>                                                                             </a:t>
+            </a:r>
+            <a:r>
+              <a:rPr lang="en-US" sz="2000" b="1" dirty="0">
+                <a:solidFill>
+                  <a:schemeClr val="accent1"/>
+                </a:solidFill>
+                <a:latin typeface="Times New Roman" panose="02020603050405020304" pitchFamily="18" charset="0"/>
+                <a:cs typeface="Times New Roman" panose="02020603050405020304" pitchFamily="18" charset="0"/>
+              </a:rPr>
+              <a:t>Experience</a:t>
+            </a:r>
+            <a:endParaRPr lang="en-IN" sz="2000" b="1" dirty="0">
+              <a:solidFill>
+                <a:schemeClr val="accent1"/>
+              </a:solidFill>
+              <a:latin typeface="Times New Roman" panose="02020603050405020304" pitchFamily="18" charset="0"/>
+              <a:cs typeface="Times New Roman" panose="02020603050405020304" pitchFamily="18" charset="0"/>
+            </a:endParaRPr>
+          </a:p>
+        </p:txBody>
+      </p:sp>
+      <p:sp>
+        <p:nvSpPr>
+          <p:cNvPr id="5" name="TextBox 4">
+            <a:extLst>
+              <a:ext uri="{FF2B5EF4-FFF2-40B4-BE49-F238E27FC236}">
+                <a16:creationId xmlns:a16="http://schemas.microsoft.com/office/drawing/2014/main" id="{50C47E59-394D-A7E0-B0C9-18BFDF81641E}"/>
+              </a:ext>
+            </a:extLst>
+          </p:cNvPr>
+          <p:cNvSpPr txBox="1"/>
           <p:nvPr/>
-        </p:nvPicPr>
-        <p:blipFill>
-          <a:blip r:embed="rId2"/>
-          <a:stretch>
-            <a:fillRect/>
-          </a:stretch>
-        </p:blipFill>
+        </p:nvSpPr>
         <p:spPr>
           <a:xfrm>
-            <a:off x="662489" y="807243"/>
-            <a:ext cx="10550942" cy="5243513"/>
+            <a:off x="0" y="2088679"/>
+            <a:ext cx="12221029" cy="1754326"/>
           </a:xfrm>
           <a:prstGeom prst="rect">
             <a:avLst/>
           </a:prstGeom>
+          <a:noFill/>
         </p:spPr>
-      </p:pic>
+        <p:txBody>
+          <a:bodyPr wrap="square">
+            <a:spAutoFit/>
+          </a:bodyPr>
+          <a:lstStyle/>
+          <a:p>
+            <a:r>
+              <a:rPr lang="en-US" sz="1800" dirty="0"/>
+              <a:t>In this project analyzed rental housing trends across five major Indian cities by scraping and cleaning 1,200+ property listings from </a:t>
+            </a:r>
+            <a:r>
+              <a:rPr lang="en-US" sz="1800" dirty="0" err="1"/>
+              <a:t>MagicBricks</a:t>
+            </a:r>
+            <a:r>
+              <a:rPr lang="en-US" sz="1800" dirty="0"/>
+              <a:t> using Python. After transforming messy text data into structured numeric form, exploratory analysis revealed key insights like price–area correlation, city-wise rental differences, and furnishing premiums. Visualizations showed that BHK and bathroom count strongly influence rent. Overall, it demonstrated the full data science workflow from data collection to insight generation.</a:t>
+            </a:r>
+          </a:p>
+          <a:p>
+            <a:endParaRPr lang="en-GB" sz="1800" dirty="0"/>
+          </a:p>
+        </p:txBody>
+      </p:sp>
     </p:spTree>
     <p:extLst>
       <p:ext uri="{BB962C8B-B14F-4D97-AF65-F5344CB8AC3E}">
-        <p14:creationId xmlns:p14="http://schemas.microsoft.com/office/powerpoint/2010/main" val="2443082663"/>
+        <p14:creationId xmlns:p14="http://schemas.microsoft.com/office/powerpoint/2010/main" val="2884200202"/>
       </p:ext>
     </p:extLst>
   </p:cSld>
@@ -12598,257 +13102,6 @@
           <p:cNvPr id="2" name="Title 1">
             <a:extLst>
               <a:ext uri="{FF2B5EF4-FFF2-40B4-BE49-F238E27FC236}">
-                <a16:creationId xmlns:a16="http://schemas.microsoft.com/office/drawing/2014/main" id="{FA68939D-7835-4D4B-42C8-27566F4A0380}"/>
-              </a:ext>
-            </a:extLst>
-          </p:cNvPr>
-          <p:cNvSpPr>
-            <a:spLocks noGrp="1"/>
-          </p:cNvSpPr>
-          <p:nvPr>
-            <p:ph type="title"/>
-          </p:nvPr>
-        </p:nvSpPr>
-        <p:spPr/>
-        <p:txBody>
-          <a:bodyPr>
-            <a:normAutofit/>
-          </a:bodyPr>
-          <a:lstStyle/>
-          <a:p>
-            <a:r>
-              <a:rPr lang="en-US" sz="2000" b="1" dirty="0">
-                <a:solidFill>
-                  <a:schemeClr val="accent1"/>
-                </a:solidFill>
-              </a:rPr>
-              <a:t>                                                                                   </a:t>
-            </a:r>
-            <a:r>
-              <a:rPr lang="en-US" sz="2000" b="1" dirty="0">
-                <a:solidFill>
-                  <a:schemeClr val="accent1"/>
-                </a:solidFill>
-                <a:latin typeface="Times New Roman" panose="02020603050405020304" pitchFamily="18" charset="0"/>
-                <a:cs typeface="Times New Roman" panose="02020603050405020304" pitchFamily="18" charset="0"/>
-              </a:rPr>
-              <a:t>Conclusion</a:t>
-            </a:r>
-            <a:endParaRPr lang="en-IN" sz="2000" b="1" dirty="0">
-              <a:solidFill>
-                <a:schemeClr val="accent1"/>
-              </a:solidFill>
-              <a:latin typeface="Times New Roman" panose="02020603050405020304" pitchFamily="18" charset="0"/>
-              <a:cs typeface="Times New Roman" panose="02020603050405020304" pitchFamily="18" charset="0"/>
-            </a:endParaRPr>
-          </a:p>
-        </p:txBody>
-      </p:sp>
-      <p:sp>
-        <p:nvSpPr>
-          <p:cNvPr id="3" name="Text Placeholder 2">
-            <a:extLst>
-              <a:ext uri="{FF2B5EF4-FFF2-40B4-BE49-F238E27FC236}">
-                <a16:creationId xmlns:a16="http://schemas.microsoft.com/office/drawing/2014/main" id="{E0606E9B-38DF-2524-1ACC-0272DC47B164}"/>
-              </a:ext>
-            </a:extLst>
-          </p:cNvPr>
-          <p:cNvSpPr>
-            <a:spLocks noGrp="1"/>
-          </p:cNvSpPr>
-          <p:nvPr>
-            <p:ph type="body" idx="1"/>
-          </p:nvPr>
-        </p:nvSpPr>
-        <p:spPr/>
-        <p:txBody>
-          <a:bodyPr>
-            <a:normAutofit/>
-          </a:bodyPr>
-          <a:lstStyle/>
-          <a:p>
-            <a:pPr marL="114300" indent="0">
-              <a:buNone/>
-            </a:pPr>
-            <a:endParaRPr lang="en-IN" sz="1800" dirty="0"/>
-          </a:p>
-        </p:txBody>
-      </p:sp>
-    </p:spTree>
-    <p:extLst>
-      <p:ext uri="{BB962C8B-B14F-4D97-AF65-F5344CB8AC3E}">
-        <p14:creationId xmlns:p14="http://schemas.microsoft.com/office/powerpoint/2010/main" val="2582021120"/>
-      </p:ext>
-    </p:extLst>
-  </p:cSld>
-  <p:clrMapOvr>
-    <a:masterClrMapping/>
-  </p:clrMapOvr>
-</p:sld>
-</file>
-
-<file path=ppt/slides/slide21.xml><?xml version="1.0" encoding="utf-8"?>
-<p:sld xmlns:a="http://schemas.openxmlformats.org/drawingml/2006/main" xmlns:r="http://schemas.openxmlformats.org/officeDocument/2006/relationships" xmlns:p="http://schemas.openxmlformats.org/presentationml/2006/main">
-  <p:cSld>
-    <p:spTree>
-      <p:nvGrpSpPr>
-        <p:cNvPr id="1" name=""/>
-        <p:cNvGrpSpPr/>
-        <p:nvPr/>
-      </p:nvGrpSpPr>
-      <p:grpSpPr>
-        <a:xfrm>
-          <a:off x="0" y="0"/>
-          <a:ext cx="0" cy="0"/>
-          <a:chOff x="0" y="0"/>
-          <a:chExt cx="0" cy="0"/>
-        </a:xfrm>
-      </p:grpSpPr>
-      <p:sp>
-        <p:nvSpPr>
-          <p:cNvPr id="2" name="Title 1">
-            <a:extLst>
-              <a:ext uri="{FF2B5EF4-FFF2-40B4-BE49-F238E27FC236}">
-                <a16:creationId xmlns:a16="http://schemas.microsoft.com/office/drawing/2014/main" id="{3FA2FBE7-F43D-C2BE-42F7-9B4DAC3D4C97}"/>
-              </a:ext>
-            </a:extLst>
-          </p:cNvPr>
-          <p:cNvSpPr>
-            <a:spLocks noGrp="1"/>
-          </p:cNvSpPr>
-          <p:nvPr>
-            <p:ph type="title"/>
-          </p:nvPr>
-        </p:nvSpPr>
-        <p:spPr/>
-        <p:txBody>
-          <a:bodyPr>
-            <a:normAutofit/>
-          </a:bodyPr>
-          <a:lstStyle/>
-          <a:p>
-            <a:r>
-              <a:rPr lang="en-US" sz="2000" b="1" dirty="0"/>
-              <a:t>                                                                             </a:t>
-            </a:r>
-            <a:r>
-              <a:rPr lang="en-US" sz="2000" b="1" dirty="0">
-                <a:solidFill>
-                  <a:schemeClr val="accent1"/>
-                </a:solidFill>
-                <a:latin typeface="Times New Roman" panose="02020603050405020304" pitchFamily="18" charset="0"/>
-                <a:cs typeface="Times New Roman" panose="02020603050405020304" pitchFamily="18" charset="0"/>
-              </a:rPr>
-              <a:t>Experience</a:t>
-            </a:r>
-            <a:endParaRPr lang="en-IN" sz="2000" b="1" dirty="0">
-              <a:solidFill>
-                <a:schemeClr val="accent1"/>
-              </a:solidFill>
-              <a:latin typeface="Times New Roman" panose="02020603050405020304" pitchFamily="18" charset="0"/>
-              <a:cs typeface="Times New Roman" panose="02020603050405020304" pitchFamily="18" charset="0"/>
-            </a:endParaRPr>
-          </a:p>
-        </p:txBody>
-      </p:sp>
-      <p:sp>
-        <p:nvSpPr>
-          <p:cNvPr id="4" name="TextBox 3">
-            <a:extLst>
-              <a:ext uri="{FF2B5EF4-FFF2-40B4-BE49-F238E27FC236}">
-                <a16:creationId xmlns:a16="http://schemas.microsoft.com/office/drawing/2014/main" id="{A904607C-AEFD-3DA5-2692-F9FE88D5D44C}"/>
-              </a:ext>
-            </a:extLst>
-          </p:cNvPr>
-          <p:cNvSpPr txBox="1"/>
-          <p:nvPr/>
-        </p:nvSpPr>
-        <p:spPr>
-          <a:xfrm>
-            <a:off x="667103" y="1690688"/>
-            <a:ext cx="10275217" cy="1200329"/>
-          </a:xfrm>
-          <a:prstGeom prst="rect">
-            <a:avLst/>
-          </a:prstGeom>
-          <a:noFill/>
-        </p:spPr>
-        <p:txBody>
-          <a:bodyPr wrap="square">
-            <a:spAutoFit/>
-          </a:bodyPr>
-          <a:lstStyle/>
-          <a:p>
-            <a:r>
-              <a:rPr lang="en-US" sz="1800" dirty="0">
-                <a:latin typeface="Times New Roman" panose="02020603050405020304" pitchFamily="18" charset="0"/>
-                <a:ea typeface="Calibri" panose="020F0502020204030204" pitchFamily="34" charset="0"/>
-                <a:cs typeface="Times New Roman" panose="02020603050405020304" pitchFamily="18" charset="0"/>
-              </a:rPr>
-              <a:t>Working on the web scraping and data analysis project for the Magic Bricks website has been both an enriching and insightful experience. The project involved several key steps, each presenting its own set of challenges and learning opportunities. </a:t>
-            </a:r>
-            <a:r>
-              <a:rPr lang="en-IN" sz="1800" dirty="0">
-                <a:latin typeface="Times New Roman" panose="02020603050405020304" pitchFamily="18" charset="0"/>
-                <a:ea typeface="Calibri" panose="020F0502020204030204" pitchFamily="34" charset="0"/>
-                <a:cs typeface="Times New Roman" panose="02020603050405020304" pitchFamily="18" charset="0"/>
-              </a:rPr>
-              <a:t>Utilized tools like BeautifulSoup </a:t>
-            </a:r>
-            <a:r>
-              <a:rPr lang="en-US" sz="1800" dirty="0">
-                <a:latin typeface="Times New Roman" panose="02020603050405020304" pitchFamily="18" charset="0"/>
-                <a:ea typeface="Calibri" panose="020F0502020204030204" pitchFamily="34" charset="0"/>
-                <a:cs typeface="Times New Roman" panose="02020603050405020304" pitchFamily="18" charset="0"/>
-              </a:rPr>
-              <a:t>to scrape data from the Magic Bricks website</a:t>
-            </a:r>
-            <a:r>
-              <a:rPr lang="en-US" sz="1800" dirty="0">
-                <a:latin typeface="Calibri" panose="020F0502020204030204" pitchFamily="34" charset="0"/>
-                <a:ea typeface="Calibri" panose="020F0502020204030204" pitchFamily="34" charset="0"/>
-                <a:cs typeface="Calibri" panose="020F0502020204030204" pitchFamily="34" charset="0"/>
-              </a:rPr>
-              <a:t>.</a:t>
-            </a:r>
-          </a:p>
-        </p:txBody>
-      </p:sp>
-    </p:spTree>
-    <p:extLst>
-      <p:ext uri="{BB962C8B-B14F-4D97-AF65-F5344CB8AC3E}">
-        <p14:creationId xmlns:p14="http://schemas.microsoft.com/office/powerpoint/2010/main" val="2884200202"/>
-      </p:ext>
-    </p:extLst>
-  </p:cSld>
-  <p:clrMapOvr>
-    <a:masterClrMapping/>
-  </p:clrMapOvr>
-</p:sld>
-</file>
-
-<file path=ppt/slides/slide22.xml><?xml version="1.0" encoding="utf-8"?>
-<p:sld xmlns:a="http://schemas.openxmlformats.org/drawingml/2006/main" xmlns:r="http://schemas.openxmlformats.org/officeDocument/2006/relationships" xmlns:p="http://schemas.openxmlformats.org/presentationml/2006/main">
-  <p:cSld>
-    <p:spTree>
-      <p:nvGrpSpPr>
-        <p:cNvPr id="1" name=""/>
-        <p:cNvGrpSpPr/>
-        <p:nvPr/>
-      </p:nvGrpSpPr>
-      <p:grpSpPr>
-        <a:xfrm>
-          <a:off x="0" y="0"/>
-          <a:ext cx="0" cy="0"/>
-          <a:chOff x="0" y="0"/>
-          <a:chExt cx="0" cy="0"/>
-        </a:xfrm>
-      </p:grpSpPr>
-      <p:sp>
-        <p:nvSpPr>
-          <p:cNvPr id="2" name="Title 1">
-            <a:extLst>
-              <a:ext uri="{FF2B5EF4-FFF2-40B4-BE49-F238E27FC236}">
                 <a16:creationId xmlns:a16="http://schemas.microsoft.com/office/drawing/2014/main" id="{14BEEA87-0024-49E1-64C8-CE80C098B0A6}"/>
               </a:ext>
             </a:extLst>
@@ -12905,7 +13158,7 @@
 </p:sld>
 </file>
 
-<file path=ppt/slides/slide23.xml><?xml version="1.0" encoding="utf-8"?>
+<file path=ppt/slides/slide21.xml><?xml version="1.0" encoding="utf-8"?>
 <p:sld xmlns:a="http://schemas.openxmlformats.org/drawingml/2006/main" xmlns:r="http://schemas.openxmlformats.org/officeDocument/2006/relationships" xmlns:p="http://schemas.openxmlformats.org/presentationml/2006/main">
   <p:cSld>
     <p:spTree>

--- a/webscrapingproject main File.pptx
+++ b/webscrapingproject main File.pptx
@@ -5,51 +5,52 @@
     <p:sldMasterId id="2147483648" r:id="rId1"/>
   </p:sldMasterIdLst>
   <p:notesMasterIdLst>
-    <p:notesMasterId r:id="rId23"/>
+    <p:notesMasterId r:id="rId24"/>
   </p:notesMasterIdLst>
   <p:sldIdLst>
     <p:sldId id="256" r:id="rId2"/>
     <p:sldId id="257" r:id="rId3"/>
     <p:sldId id="260" r:id="rId4"/>
     <p:sldId id="261" r:id="rId5"/>
-    <p:sldId id="263" r:id="rId6"/>
-    <p:sldId id="264" r:id="rId7"/>
-    <p:sldId id="281" r:id="rId8"/>
-    <p:sldId id="265" r:id="rId9"/>
-    <p:sldId id="271" r:id="rId10"/>
-    <p:sldId id="272" r:id="rId11"/>
-    <p:sldId id="273" r:id="rId12"/>
-    <p:sldId id="274" r:id="rId13"/>
-    <p:sldId id="275" r:id="rId14"/>
-    <p:sldId id="276" r:id="rId15"/>
-    <p:sldId id="262" r:id="rId16"/>
-    <p:sldId id="278" r:id="rId17"/>
-    <p:sldId id="279" r:id="rId18"/>
-    <p:sldId id="267" r:id="rId19"/>
-    <p:sldId id="268" r:id="rId20"/>
-    <p:sldId id="270" r:id="rId21"/>
-    <p:sldId id="259" r:id="rId22"/>
+    <p:sldId id="282" r:id="rId6"/>
+    <p:sldId id="263" r:id="rId7"/>
+    <p:sldId id="264" r:id="rId8"/>
+    <p:sldId id="281" r:id="rId9"/>
+    <p:sldId id="265" r:id="rId10"/>
+    <p:sldId id="271" r:id="rId11"/>
+    <p:sldId id="272" r:id="rId12"/>
+    <p:sldId id="273" r:id="rId13"/>
+    <p:sldId id="274" r:id="rId14"/>
+    <p:sldId id="275" r:id="rId15"/>
+    <p:sldId id="276" r:id="rId16"/>
+    <p:sldId id="262" r:id="rId17"/>
+    <p:sldId id="278" r:id="rId18"/>
+    <p:sldId id="279" r:id="rId19"/>
+    <p:sldId id="267" r:id="rId20"/>
+    <p:sldId id="268" r:id="rId21"/>
+    <p:sldId id="270" r:id="rId22"/>
+    <p:sldId id="259" r:id="rId23"/>
   </p:sldIdLst>
   <p:sldSz cx="12192000" cy="6858000"/>
   <p:notesSz cx="6858000" cy="9144000"/>
   <p:embeddedFontLst>
     <p:embeddedFont>
       <p:font typeface="Consolas" panose="020B0609020204030204" pitchFamily="49" charset="0"/>
-      <p:regular r:id="rId24"/>
-      <p:bold r:id="rId25"/>
-      <p:italic r:id="rId26"/>
-      <p:boldItalic r:id="rId27"/>
+      <p:regular r:id="rId25"/>
+      <p:bold r:id="rId26"/>
+      <p:italic r:id="rId27"/>
+      <p:boldItalic r:id="rId28"/>
     </p:embeddedFont>
     <p:embeddedFont>
       <p:font typeface="Lato Black" panose="020F0502020204030203" pitchFamily="34" charset="0"/>
-      <p:bold r:id="rId28"/>
-      <p:boldItalic r:id="rId29"/>
+      <p:bold r:id="rId29"/>
+      <p:boldItalic r:id="rId30"/>
     </p:embeddedFont>
     <p:embeddedFont>
       <p:font typeface="Libre Baskerville" panose="02000000000000000000" pitchFamily="2" charset="0"/>
-      <p:regular r:id="rId30"/>
-      <p:bold r:id="rId31"/>
-      <p:italic r:id="rId32"/>
+      <p:regular r:id="rId31"/>
+      <p:bold r:id="rId32"/>
+      <p:italic r:id="rId33"/>
     </p:embeddedFont>
   </p:embeddedFontLst>
   <p:defaultTextStyle>
@@ -286,7 +287,7 @@
       <p15:sldGuideLst xmlns:p15="http://schemas.microsoft.com/office/powerpoint/2012/main"/>
     </p:ext>
     <p:ext uri="GoogleSlidesCustomDataVersion2">
-      <go:slidesCustomData xmlns="" xmlns:mc="http://schemas.openxmlformats.org/markup-compatibility/2006" xmlns:mv="urn:schemas-microsoft-com:mac:vml" xmlns:c="http://schemas.openxmlformats.org/drawingml/2006/chart" xmlns:dgm="http://schemas.openxmlformats.org/drawingml/2006/diagram" xmlns:o="urn:schemas-microsoft-com:office:office" xmlns:v="urn:schemas-microsoft-com:vml" xmlns:pvml="urn:schemas-microsoft-com:office:powerpoint" xmlns:com="http://schemas.openxmlformats.org/drawingml/2006/compatibility" xmlns:p14="http://schemas.microsoft.com/office/powerpoint/2010/main" xmlns:p15="http://schemas.microsoft.com/office/powerpoint/2012/main" xmlns:ahyp="http://schemas.microsoft.com/office/drawing/2018/hyperlinkcolor" xmlns:go="http://customooxmlschemas.google.com/" r:id="rId35" roundtripDataSignature="AMtx7mhnFQsu0qTBRZ+C47HNp0tuHCNkog=="/>
+      <go:slidesCustomData xmlns:go="http://customooxmlschemas.google.com/" xmlns:ahyp="http://schemas.microsoft.com/office/drawing/2018/hyperlinkcolor" xmlns:p15="http://schemas.microsoft.com/office/powerpoint/2012/main" xmlns:p14="http://schemas.microsoft.com/office/powerpoint/2010/main" xmlns:com="http://schemas.openxmlformats.org/drawingml/2006/compatibility" xmlns:pvml="urn:schemas-microsoft-com:office:powerpoint" xmlns:v="urn:schemas-microsoft-com:vml" xmlns:o="urn:schemas-microsoft-com:office:office" xmlns:dgm="http://schemas.openxmlformats.org/drawingml/2006/diagram" xmlns:c="http://schemas.openxmlformats.org/drawingml/2006/chart" xmlns:mv="urn:schemas-microsoft-com:mac:vml" xmlns:mc="http://schemas.openxmlformats.org/markup-compatibility/2006" xmlns="" r:id="rId35" roundtripDataSignature="AMtx7mhnFQsu0qTBRZ+C47HNp0tuHCNkog=="/>
     </p:ext>
   </p:extLst>
 </p:presentation>
@@ -11286,6 +11287,114 @@
       </p:grpSpPr>
       <p:pic>
         <p:nvPicPr>
+          <p:cNvPr id="4" name="Picture 3">
+            <a:extLst>
+              <a:ext uri="{FF2B5EF4-FFF2-40B4-BE49-F238E27FC236}">
+                <a16:creationId xmlns:a16="http://schemas.microsoft.com/office/drawing/2014/main" id="{92EF33CE-33B5-55EE-D839-F06634CC2E79}"/>
+              </a:ext>
+            </a:extLst>
+          </p:cNvPr>
+          <p:cNvPicPr>
+            <a:picLocks noChangeAspect="1"/>
+          </p:cNvPicPr>
+          <p:nvPr/>
+        </p:nvPicPr>
+        <p:blipFill>
+          <a:blip r:embed="rId2"/>
+          <a:stretch>
+            <a:fillRect/>
+          </a:stretch>
+        </p:blipFill>
+        <p:spPr>
+          <a:xfrm>
+            <a:off x="0" y="1181484"/>
+            <a:ext cx="12192000" cy="4495031"/>
+          </a:xfrm>
+          <a:prstGeom prst="rect">
+            <a:avLst/>
+          </a:prstGeom>
+        </p:spPr>
+      </p:pic>
+      <p:sp>
+        <p:nvSpPr>
+          <p:cNvPr id="6" name="TextBox 5">
+            <a:extLst>
+              <a:ext uri="{FF2B5EF4-FFF2-40B4-BE49-F238E27FC236}">
+                <a16:creationId xmlns:a16="http://schemas.microsoft.com/office/drawing/2014/main" id="{8FAFE32F-A5A1-6DBF-2190-651C056560F0}"/>
+              </a:ext>
+            </a:extLst>
+          </p:cNvPr>
+          <p:cNvSpPr txBox="1"/>
+          <p:nvPr/>
+        </p:nvSpPr>
+        <p:spPr>
+          <a:xfrm>
+            <a:off x="0" y="338912"/>
+            <a:ext cx="12192000" cy="355418"/>
+          </a:xfrm>
+          <a:prstGeom prst="rect">
+            <a:avLst/>
+          </a:prstGeom>
+          <a:noFill/>
+        </p:spPr>
+        <p:txBody>
+          <a:bodyPr wrap="square">
+            <a:spAutoFit/>
+          </a:bodyPr>
+          <a:lstStyle/>
+          <a:p>
+            <a:pPr algn="ctr">
+              <a:lnSpc>
+                <a:spcPts val="1425"/>
+              </a:lnSpc>
+              <a:buNone/>
+            </a:pPr>
+            <a:r>
+              <a:rPr lang="en-GB" sz="4400" kern="1200" dirty="0">
+                <a:solidFill>
+                  <a:schemeClr val="tx1"/>
+                </a:solidFill>
+                <a:latin typeface="+mj-lt"/>
+                <a:ea typeface="+mj-ea"/>
+                <a:cs typeface="+mj-cs"/>
+              </a:rPr>
+              <a:t>Furnishing Status Analysis</a:t>
+            </a:r>
+          </a:p>
+        </p:txBody>
+      </p:sp>
+    </p:spTree>
+    <p:extLst>
+      <p:ext uri="{BB962C8B-B14F-4D97-AF65-F5344CB8AC3E}">
+        <p14:creationId xmlns:p14="http://schemas.microsoft.com/office/powerpoint/2010/main" val="372715865"/>
+      </p:ext>
+    </p:extLst>
+  </p:cSld>
+  <p:clrMapOvr>
+    <a:masterClrMapping/>
+  </p:clrMapOvr>
+</p:sld>
+</file>
+
+<file path=ppt/slides/slide11.xml><?xml version="1.0" encoding="utf-8"?>
+<p:sld xmlns:a="http://schemas.openxmlformats.org/drawingml/2006/main" xmlns:r="http://schemas.openxmlformats.org/officeDocument/2006/relationships" xmlns:p="http://schemas.openxmlformats.org/presentationml/2006/main">
+  <p:cSld>
+    <p:spTree>
+      <p:nvGrpSpPr>
+        <p:cNvPr id="1" name=""/>
+        <p:cNvGrpSpPr/>
+        <p:nvPr/>
+      </p:nvGrpSpPr>
+      <p:grpSpPr>
+        <a:xfrm>
+          <a:off x="0" y="0"/>
+          <a:ext cx="0" cy="0"/>
+          <a:chOff x="0" y="0"/>
+          <a:chExt cx="0" cy="0"/>
+        </a:xfrm>
+      </p:grpSpPr>
+      <p:pic>
+        <p:nvPicPr>
           <p:cNvPr id="8" name="Picture 7">
             <a:extLst>
               <a:ext uri="{FF2B5EF4-FFF2-40B4-BE49-F238E27FC236}">
@@ -11375,7 +11484,7 @@
 </p:sld>
 </file>
 
-<file path=ppt/slides/slide11.xml><?xml version="1.0" encoding="utf-8"?>
+<file path=ppt/slides/slide12.xml><?xml version="1.0" encoding="utf-8"?>
 <p:sld xmlns:a="http://schemas.openxmlformats.org/drawingml/2006/main" xmlns:r="http://schemas.openxmlformats.org/officeDocument/2006/relationships" xmlns:p="http://schemas.openxmlformats.org/presentationml/2006/main">
   <p:cSld>
     <p:spTree>
@@ -11489,7 +11598,7 @@
 </p:sld>
 </file>
 
-<file path=ppt/slides/slide12.xml><?xml version="1.0" encoding="utf-8"?>
+<file path=ppt/slides/slide13.xml><?xml version="1.0" encoding="utf-8"?>
 <p:sld xmlns:a="http://schemas.openxmlformats.org/drawingml/2006/main" xmlns:r="http://schemas.openxmlformats.org/officeDocument/2006/relationships" xmlns:p="http://schemas.openxmlformats.org/presentationml/2006/main">
   <p:cSld>
     <p:spTree>
@@ -11610,7 +11719,7 @@
 </p:sld>
 </file>
 
-<file path=ppt/slides/slide13.xml><?xml version="1.0" encoding="utf-8"?>
+<file path=ppt/slides/slide14.xml><?xml version="1.0" encoding="utf-8"?>
 <p:sld xmlns:a="http://schemas.openxmlformats.org/drawingml/2006/main" xmlns:r="http://schemas.openxmlformats.org/officeDocument/2006/relationships" xmlns:p="http://schemas.openxmlformats.org/presentationml/2006/main">
   <p:cSld>
     <p:bg>
@@ -11740,7 +11849,7 @@
 </p:sld>
 </file>
 
-<file path=ppt/slides/slide14.xml><?xml version="1.0" encoding="utf-8"?>
+<file path=ppt/slides/slide15.xml><?xml version="1.0" encoding="utf-8"?>
 <p:sld xmlns:a="http://schemas.openxmlformats.org/drawingml/2006/main" xmlns:r="http://schemas.openxmlformats.org/officeDocument/2006/relationships" xmlns:p="http://schemas.openxmlformats.org/presentationml/2006/main">
   <p:cSld>
     <p:bg>
@@ -11880,7 +11989,7 @@
 </p:sld>
 </file>
 
-<file path=ppt/slides/slide15.xml><?xml version="1.0" encoding="utf-8"?>
+<file path=ppt/slides/slide16.xml><?xml version="1.0" encoding="utf-8"?>
 <p:sld xmlns:a="http://schemas.openxmlformats.org/drawingml/2006/main" xmlns:r="http://schemas.openxmlformats.org/officeDocument/2006/relationships" xmlns:p="http://schemas.openxmlformats.org/presentationml/2006/main">
   <p:cSld>
     <p:spTree>
@@ -11998,7 +12107,7 @@
 </p:sld>
 </file>
 
-<file path=ppt/slides/slide16.xml><?xml version="1.0" encoding="utf-8"?>
+<file path=ppt/slides/slide17.xml><?xml version="1.0" encoding="utf-8"?>
 <p:sld xmlns:a="http://schemas.openxmlformats.org/drawingml/2006/main" xmlns:r="http://schemas.openxmlformats.org/officeDocument/2006/relationships" xmlns:p="http://schemas.openxmlformats.org/presentationml/2006/main">
   <p:cSld>
     <p:spTree>
@@ -12136,7 +12245,7 @@
 </p:sld>
 </file>
 
-<file path=ppt/slides/slide17.xml><?xml version="1.0" encoding="utf-8"?>
+<file path=ppt/slides/slide18.xml><?xml version="1.0" encoding="utf-8"?>
 <p:sld xmlns:a="http://schemas.openxmlformats.org/drawingml/2006/main" xmlns:r="http://schemas.openxmlformats.org/officeDocument/2006/relationships" xmlns:p="http://schemas.openxmlformats.org/presentationml/2006/main">
   <p:cSld>
     <p:spTree>
@@ -12276,7 +12385,7 @@
 </p:sld>
 </file>
 
-<file path=ppt/slides/slide18.xml><?xml version="1.0" encoding="utf-8"?>
+<file path=ppt/slides/slide19.xml><?xml version="1.0" encoding="utf-8"?>
 <p:sld xmlns:a="http://schemas.openxmlformats.org/drawingml/2006/main" xmlns:r="http://schemas.openxmlformats.org/officeDocument/2006/relationships" xmlns:p="http://schemas.openxmlformats.org/presentationml/2006/main">
   <p:cSld>
     <p:spTree>
@@ -12558,129 +12667,6 @@
     <p:extLst>
       <p:ext uri="{BB962C8B-B14F-4D97-AF65-F5344CB8AC3E}">
         <p14:creationId xmlns:p14="http://schemas.microsoft.com/office/powerpoint/2010/main" val="2582021120"/>
-      </p:ext>
-    </p:extLst>
-  </p:cSld>
-  <p:clrMapOvr>
-    <a:masterClrMapping/>
-  </p:clrMapOvr>
-</p:sld>
-</file>
-
-<file path=ppt/slides/slide19.xml><?xml version="1.0" encoding="utf-8"?>
-<p:sld xmlns:a="http://schemas.openxmlformats.org/drawingml/2006/main" xmlns:r="http://schemas.openxmlformats.org/officeDocument/2006/relationships" xmlns:p="http://schemas.openxmlformats.org/presentationml/2006/main">
-  <p:cSld>
-    <p:spTree>
-      <p:nvGrpSpPr>
-        <p:cNvPr id="1" name=""/>
-        <p:cNvGrpSpPr/>
-        <p:nvPr/>
-      </p:nvGrpSpPr>
-      <p:grpSpPr>
-        <a:xfrm>
-          <a:off x="0" y="0"/>
-          <a:ext cx="0" cy="0"/>
-          <a:chOff x="0" y="0"/>
-          <a:chExt cx="0" cy="0"/>
-        </a:xfrm>
-      </p:grpSpPr>
-      <p:sp>
-        <p:nvSpPr>
-          <p:cNvPr id="2" name="Title 1">
-            <a:extLst>
-              <a:ext uri="{FF2B5EF4-FFF2-40B4-BE49-F238E27FC236}">
-                <a16:creationId xmlns:a16="http://schemas.microsoft.com/office/drawing/2014/main" id="{3FA2FBE7-F43D-C2BE-42F7-9B4DAC3D4C97}"/>
-              </a:ext>
-            </a:extLst>
-          </p:cNvPr>
-          <p:cNvSpPr>
-            <a:spLocks noGrp="1"/>
-          </p:cNvSpPr>
-          <p:nvPr>
-            <p:ph type="title"/>
-          </p:nvPr>
-        </p:nvSpPr>
-        <p:spPr/>
-        <p:txBody>
-          <a:bodyPr>
-            <a:normAutofit/>
-          </a:bodyPr>
-          <a:lstStyle/>
-          <a:p>
-            <a:r>
-              <a:rPr lang="en-US" sz="2000" b="1" dirty="0"/>
-              <a:t>                                                                             </a:t>
-            </a:r>
-            <a:r>
-              <a:rPr lang="en-US" sz="2000" b="1" dirty="0">
-                <a:solidFill>
-                  <a:schemeClr val="accent1"/>
-                </a:solidFill>
-                <a:latin typeface="Times New Roman" panose="02020603050405020304" pitchFamily="18" charset="0"/>
-                <a:cs typeface="Times New Roman" panose="02020603050405020304" pitchFamily="18" charset="0"/>
-              </a:rPr>
-              <a:t>Experience</a:t>
-            </a:r>
-            <a:endParaRPr lang="en-IN" sz="2000" b="1" dirty="0">
-              <a:solidFill>
-                <a:schemeClr val="accent1"/>
-              </a:solidFill>
-              <a:latin typeface="Times New Roman" panose="02020603050405020304" pitchFamily="18" charset="0"/>
-              <a:cs typeface="Times New Roman" panose="02020603050405020304" pitchFamily="18" charset="0"/>
-            </a:endParaRPr>
-          </a:p>
-        </p:txBody>
-      </p:sp>
-      <p:sp>
-        <p:nvSpPr>
-          <p:cNvPr id="5" name="TextBox 4">
-            <a:extLst>
-              <a:ext uri="{FF2B5EF4-FFF2-40B4-BE49-F238E27FC236}">
-                <a16:creationId xmlns:a16="http://schemas.microsoft.com/office/drawing/2014/main" id="{50C47E59-394D-A7E0-B0C9-18BFDF81641E}"/>
-              </a:ext>
-            </a:extLst>
-          </p:cNvPr>
-          <p:cNvSpPr txBox="1"/>
-          <p:nvPr/>
-        </p:nvSpPr>
-        <p:spPr>
-          <a:xfrm>
-            <a:off x="0" y="2088679"/>
-            <a:ext cx="12221029" cy="1754326"/>
-          </a:xfrm>
-          <a:prstGeom prst="rect">
-            <a:avLst/>
-          </a:prstGeom>
-          <a:noFill/>
-        </p:spPr>
-        <p:txBody>
-          <a:bodyPr wrap="square">
-            <a:spAutoFit/>
-          </a:bodyPr>
-          <a:lstStyle/>
-          <a:p>
-            <a:r>
-              <a:rPr lang="en-US" sz="1800" dirty="0"/>
-              <a:t>In this project analyzed rental housing trends across five major Indian cities by scraping and cleaning 1,200+ property listings from </a:t>
-            </a:r>
-            <a:r>
-              <a:rPr lang="en-US" sz="1800" dirty="0" err="1"/>
-              <a:t>MagicBricks</a:t>
-            </a:r>
-            <a:r>
-              <a:rPr lang="en-US" sz="1800" dirty="0"/>
-              <a:t> using Python. After transforming messy text data into structured numeric form, exploratory analysis revealed key insights like price–area correlation, city-wise rental differences, and furnishing premiums. Visualizations showed that BHK and bathroom count strongly influence rent. Overall, it demonstrated the full data science workflow from data collection to insight generation.</a:t>
-            </a:r>
-          </a:p>
-          <a:p>
-            <a:endParaRPr lang="en-GB" sz="1800" dirty="0"/>
-          </a:p>
-        </p:txBody>
-      </p:sp>
-    </p:spTree>
-    <p:extLst>
-      <p:ext uri="{BB962C8B-B14F-4D97-AF65-F5344CB8AC3E}">
-        <p14:creationId xmlns:p14="http://schemas.microsoft.com/office/powerpoint/2010/main" val="2884200202"/>
       </p:ext>
     </p:extLst>
   </p:cSld>
@@ -13102,6 +13088,129 @@
           <p:cNvPr id="2" name="Title 1">
             <a:extLst>
               <a:ext uri="{FF2B5EF4-FFF2-40B4-BE49-F238E27FC236}">
+                <a16:creationId xmlns:a16="http://schemas.microsoft.com/office/drawing/2014/main" id="{3FA2FBE7-F43D-C2BE-42F7-9B4DAC3D4C97}"/>
+              </a:ext>
+            </a:extLst>
+          </p:cNvPr>
+          <p:cNvSpPr>
+            <a:spLocks noGrp="1"/>
+          </p:cNvSpPr>
+          <p:nvPr>
+            <p:ph type="title"/>
+          </p:nvPr>
+        </p:nvSpPr>
+        <p:spPr/>
+        <p:txBody>
+          <a:bodyPr>
+            <a:normAutofit/>
+          </a:bodyPr>
+          <a:lstStyle/>
+          <a:p>
+            <a:r>
+              <a:rPr lang="en-US" sz="2000" b="1" dirty="0"/>
+              <a:t>                                                                             </a:t>
+            </a:r>
+            <a:r>
+              <a:rPr lang="en-US" sz="2000" b="1" dirty="0">
+                <a:solidFill>
+                  <a:schemeClr val="accent1"/>
+                </a:solidFill>
+                <a:latin typeface="Times New Roman" panose="02020603050405020304" pitchFamily="18" charset="0"/>
+                <a:cs typeface="Times New Roman" panose="02020603050405020304" pitchFamily="18" charset="0"/>
+              </a:rPr>
+              <a:t>Experience</a:t>
+            </a:r>
+            <a:endParaRPr lang="en-IN" sz="2000" b="1" dirty="0">
+              <a:solidFill>
+                <a:schemeClr val="accent1"/>
+              </a:solidFill>
+              <a:latin typeface="Times New Roman" panose="02020603050405020304" pitchFamily="18" charset="0"/>
+              <a:cs typeface="Times New Roman" panose="02020603050405020304" pitchFamily="18" charset="0"/>
+            </a:endParaRPr>
+          </a:p>
+        </p:txBody>
+      </p:sp>
+      <p:sp>
+        <p:nvSpPr>
+          <p:cNvPr id="5" name="TextBox 4">
+            <a:extLst>
+              <a:ext uri="{FF2B5EF4-FFF2-40B4-BE49-F238E27FC236}">
+                <a16:creationId xmlns:a16="http://schemas.microsoft.com/office/drawing/2014/main" id="{50C47E59-394D-A7E0-B0C9-18BFDF81641E}"/>
+              </a:ext>
+            </a:extLst>
+          </p:cNvPr>
+          <p:cNvSpPr txBox="1"/>
+          <p:nvPr/>
+        </p:nvSpPr>
+        <p:spPr>
+          <a:xfrm>
+            <a:off x="0" y="2088679"/>
+            <a:ext cx="12221029" cy="2585323"/>
+          </a:xfrm>
+          <a:prstGeom prst="rect">
+            <a:avLst/>
+          </a:prstGeom>
+          <a:noFill/>
+        </p:spPr>
+        <p:txBody>
+          <a:bodyPr wrap="square">
+            <a:spAutoFit/>
+          </a:bodyPr>
+          <a:lstStyle/>
+          <a:p>
+            <a:r>
+              <a:rPr lang="en-US" sz="2400" dirty="0"/>
+              <a:t>In this project analyzed rental housing trends across five major Indian cities by scraping and cleaning 1,200+ property listings from </a:t>
+            </a:r>
+            <a:r>
+              <a:rPr lang="en-US" sz="2400" dirty="0" err="1"/>
+              <a:t>MagicBricks</a:t>
+            </a:r>
+            <a:r>
+              <a:rPr lang="en-US" sz="2400" dirty="0"/>
+              <a:t> using Python. After transforming messy text data into structured numeric form, exploratory analysis revealed key insights like price–area correlation, city-wise rental differences, and furnishing premiums. Visualizations showed that BHK and bathroom count strongly influence rent. Overall, it demonstrated the full data science workflow from data collection to insight generation.</a:t>
+            </a:r>
+          </a:p>
+          <a:p>
+            <a:endParaRPr lang="en-GB" sz="1800" dirty="0"/>
+          </a:p>
+        </p:txBody>
+      </p:sp>
+    </p:spTree>
+    <p:extLst>
+      <p:ext uri="{BB962C8B-B14F-4D97-AF65-F5344CB8AC3E}">
+        <p14:creationId xmlns:p14="http://schemas.microsoft.com/office/powerpoint/2010/main" val="2884200202"/>
+      </p:ext>
+    </p:extLst>
+  </p:cSld>
+  <p:clrMapOvr>
+    <a:masterClrMapping/>
+  </p:clrMapOvr>
+</p:sld>
+</file>
+
+<file path=ppt/slides/slide21.xml><?xml version="1.0" encoding="utf-8"?>
+<p:sld xmlns:a="http://schemas.openxmlformats.org/drawingml/2006/main" xmlns:r="http://schemas.openxmlformats.org/officeDocument/2006/relationships" xmlns:p="http://schemas.openxmlformats.org/presentationml/2006/main">
+  <p:cSld>
+    <p:spTree>
+      <p:nvGrpSpPr>
+        <p:cNvPr id="1" name=""/>
+        <p:cNvGrpSpPr/>
+        <p:nvPr/>
+      </p:nvGrpSpPr>
+      <p:grpSpPr>
+        <a:xfrm>
+          <a:off x="0" y="0"/>
+          <a:ext cx="0" cy="0"/>
+          <a:chOff x="0" y="0"/>
+          <a:chExt cx="0" cy="0"/>
+        </a:xfrm>
+      </p:grpSpPr>
+      <p:sp>
+        <p:nvSpPr>
+          <p:cNvPr id="2" name="Title 1">
+            <a:extLst>
+              <a:ext uri="{FF2B5EF4-FFF2-40B4-BE49-F238E27FC236}">
                 <a16:creationId xmlns:a16="http://schemas.microsoft.com/office/drawing/2014/main" id="{14BEEA87-0024-49E1-64C8-CE80C098B0A6}"/>
               </a:ext>
             </a:extLst>
@@ -13158,7 +13267,7 @@
 </p:sld>
 </file>
 
-<file path=ppt/slides/slide21.xml><?xml version="1.0" encoding="utf-8"?>
+<file path=ppt/slides/slide22.xml><?xml version="1.0" encoding="utf-8"?>
 <p:sld xmlns:a="http://schemas.openxmlformats.org/drawingml/2006/main" xmlns:r="http://schemas.openxmlformats.org/officeDocument/2006/relationships" xmlns:p="http://schemas.openxmlformats.org/presentationml/2006/main">
   <p:cSld>
     <p:spTree>
@@ -13804,6 +13913,72 @@
   <p:cSld>
     <p:spTree>
       <p:nvGrpSpPr>
+        <p:cNvPr id="1" name="">
+          <a:extLst>
+            <a:ext uri="{FF2B5EF4-FFF2-40B4-BE49-F238E27FC236}">
+              <a16:creationId xmlns:a16="http://schemas.microsoft.com/office/drawing/2014/main" id="{85F530E1-2D3F-16E7-DD54-188861D6ABE3}"/>
+            </a:ext>
+          </a:extLst>
+        </p:cNvPr>
+        <p:cNvGrpSpPr/>
+        <p:nvPr/>
+      </p:nvGrpSpPr>
+      <p:grpSpPr>
+        <a:xfrm>
+          <a:off x="0" y="0"/>
+          <a:ext cx="0" cy="0"/>
+          <a:chOff x="0" y="0"/>
+          <a:chExt cx="0" cy="0"/>
+        </a:xfrm>
+      </p:grpSpPr>
+      <p:pic>
+        <p:nvPicPr>
+          <p:cNvPr id="5" name="Picture 4">
+            <a:extLst>
+              <a:ext uri="{FF2B5EF4-FFF2-40B4-BE49-F238E27FC236}">
+                <a16:creationId xmlns:a16="http://schemas.microsoft.com/office/drawing/2014/main" id="{42C884D6-49ED-96DA-5E81-D5752C693150}"/>
+              </a:ext>
+            </a:extLst>
+          </p:cNvPr>
+          <p:cNvPicPr>
+            <a:picLocks noChangeAspect="1"/>
+          </p:cNvPicPr>
+          <p:nvPr/>
+        </p:nvPicPr>
+        <p:blipFill>
+          <a:blip r:embed="rId2"/>
+          <a:stretch>
+            <a:fillRect/>
+          </a:stretch>
+        </p:blipFill>
+        <p:spPr>
+          <a:xfrm>
+            <a:off x="1163611" y="344774"/>
+            <a:ext cx="10378815" cy="5921115"/>
+          </a:xfrm>
+          <a:prstGeom prst="rect">
+            <a:avLst/>
+          </a:prstGeom>
+        </p:spPr>
+      </p:pic>
+    </p:spTree>
+    <p:extLst>
+      <p:ext uri="{BB962C8B-B14F-4D97-AF65-F5344CB8AC3E}">
+        <p14:creationId xmlns:p14="http://schemas.microsoft.com/office/powerpoint/2010/main" val="842180676"/>
+      </p:ext>
+    </p:extLst>
+  </p:cSld>
+  <p:clrMapOvr>
+    <a:masterClrMapping/>
+  </p:clrMapOvr>
+</p:sld>
+</file>
+
+<file path=ppt/slides/slide6.xml><?xml version="1.0" encoding="utf-8"?>
+<p:sld xmlns:a="http://schemas.openxmlformats.org/drawingml/2006/main" xmlns:r="http://schemas.openxmlformats.org/officeDocument/2006/relationships" xmlns:p="http://schemas.openxmlformats.org/presentationml/2006/main">
+  <p:cSld>
+    <p:spTree>
+      <p:nvGrpSpPr>
         <p:cNvPr id="1" name=""/>
         <p:cNvGrpSpPr/>
         <p:nvPr/>
@@ -13907,7 +14082,7 @@
 </p:sld>
 </file>
 
-<file path=ppt/slides/slide6.xml><?xml version="1.0" encoding="utf-8"?>
+<file path=ppt/slides/slide7.xml><?xml version="1.0" encoding="utf-8"?>
 <p:sld xmlns:a="http://schemas.openxmlformats.org/drawingml/2006/main" xmlns:r="http://schemas.openxmlformats.org/officeDocument/2006/relationships" xmlns:p="http://schemas.openxmlformats.org/presentationml/2006/main">
   <p:cSld>
     <p:spTree>
@@ -14022,7 +14197,7 @@
 </p:sld>
 </file>
 
-<file path=ppt/slides/slide7.xml><?xml version="1.0" encoding="utf-8"?>
+<file path=ppt/slides/slide8.xml><?xml version="1.0" encoding="utf-8"?>
 <p:sld xmlns:a="http://schemas.openxmlformats.org/drawingml/2006/main" xmlns:r="http://schemas.openxmlformats.org/officeDocument/2006/relationships" xmlns:p="http://schemas.openxmlformats.org/presentationml/2006/main">
   <p:cSld>
     <p:spTree>
@@ -14130,7 +14305,7 @@
 </p:sld>
 </file>
 
-<file path=ppt/slides/slide8.xml><?xml version="1.0" encoding="utf-8"?>
+<file path=ppt/slides/slide9.xml><?xml version="1.0" encoding="utf-8"?>
 <p:sld xmlns:a="http://schemas.openxmlformats.org/drawingml/2006/main" xmlns:r="http://schemas.openxmlformats.org/officeDocument/2006/relationships" xmlns:p="http://schemas.openxmlformats.org/presentationml/2006/main">
   <p:cSld>
     <p:spTree>
@@ -14263,114 +14438,6 @@
     <p:extLst>
       <p:ext uri="{BB962C8B-B14F-4D97-AF65-F5344CB8AC3E}">
         <p14:creationId xmlns:p14="http://schemas.microsoft.com/office/powerpoint/2010/main" val="3154108425"/>
-      </p:ext>
-    </p:extLst>
-  </p:cSld>
-  <p:clrMapOvr>
-    <a:masterClrMapping/>
-  </p:clrMapOvr>
-</p:sld>
-</file>
-
-<file path=ppt/slides/slide9.xml><?xml version="1.0" encoding="utf-8"?>
-<p:sld xmlns:a="http://schemas.openxmlformats.org/drawingml/2006/main" xmlns:r="http://schemas.openxmlformats.org/officeDocument/2006/relationships" xmlns:p="http://schemas.openxmlformats.org/presentationml/2006/main">
-  <p:cSld>
-    <p:spTree>
-      <p:nvGrpSpPr>
-        <p:cNvPr id="1" name=""/>
-        <p:cNvGrpSpPr/>
-        <p:nvPr/>
-      </p:nvGrpSpPr>
-      <p:grpSpPr>
-        <a:xfrm>
-          <a:off x="0" y="0"/>
-          <a:ext cx="0" cy="0"/>
-          <a:chOff x="0" y="0"/>
-          <a:chExt cx="0" cy="0"/>
-        </a:xfrm>
-      </p:grpSpPr>
-      <p:pic>
-        <p:nvPicPr>
-          <p:cNvPr id="4" name="Picture 3">
-            <a:extLst>
-              <a:ext uri="{FF2B5EF4-FFF2-40B4-BE49-F238E27FC236}">
-                <a16:creationId xmlns:a16="http://schemas.microsoft.com/office/drawing/2014/main" id="{92EF33CE-33B5-55EE-D839-F06634CC2E79}"/>
-              </a:ext>
-            </a:extLst>
-          </p:cNvPr>
-          <p:cNvPicPr>
-            <a:picLocks noChangeAspect="1"/>
-          </p:cNvPicPr>
-          <p:nvPr/>
-        </p:nvPicPr>
-        <p:blipFill>
-          <a:blip r:embed="rId2"/>
-          <a:stretch>
-            <a:fillRect/>
-          </a:stretch>
-        </p:blipFill>
-        <p:spPr>
-          <a:xfrm>
-            <a:off x="0" y="1181484"/>
-            <a:ext cx="12192000" cy="4495031"/>
-          </a:xfrm>
-          <a:prstGeom prst="rect">
-            <a:avLst/>
-          </a:prstGeom>
-        </p:spPr>
-      </p:pic>
-      <p:sp>
-        <p:nvSpPr>
-          <p:cNvPr id="6" name="TextBox 5">
-            <a:extLst>
-              <a:ext uri="{FF2B5EF4-FFF2-40B4-BE49-F238E27FC236}">
-                <a16:creationId xmlns:a16="http://schemas.microsoft.com/office/drawing/2014/main" id="{8FAFE32F-A5A1-6DBF-2190-651C056560F0}"/>
-              </a:ext>
-            </a:extLst>
-          </p:cNvPr>
-          <p:cNvSpPr txBox="1"/>
-          <p:nvPr/>
-        </p:nvSpPr>
-        <p:spPr>
-          <a:xfrm>
-            <a:off x="0" y="338912"/>
-            <a:ext cx="12192000" cy="355418"/>
-          </a:xfrm>
-          <a:prstGeom prst="rect">
-            <a:avLst/>
-          </a:prstGeom>
-          <a:noFill/>
-        </p:spPr>
-        <p:txBody>
-          <a:bodyPr wrap="square">
-            <a:spAutoFit/>
-          </a:bodyPr>
-          <a:lstStyle/>
-          <a:p>
-            <a:pPr algn="ctr">
-              <a:lnSpc>
-                <a:spcPts val="1425"/>
-              </a:lnSpc>
-              <a:buNone/>
-            </a:pPr>
-            <a:r>
-              <a:rPr lang="en-GB" sz="4400" kern="1200" dirty="0">
-                <a:solidFill>
-                  <a:schemeClr val="tx1"/>
-                </a:solidFill>
-                <a:latin typeface="+mj-lt"/>
-                <a:ea typeface="+mj-ea"/>
-                <a:cs typeface="+mj-cs"/>
-              </a:rPr>
-              <a:t>Furnishing Status Analysis</a:t>
-            </a:r>
-          </a:p>
-        </p:txBody>
-      </p:sp>
-    </p:spTree>
-    <p:extLst>
-      <p:ext uri="{BB962C8B-B14F-4D97-AF65-F5344CB8AC3E}">
-        <p14:creationId xmlns:p14="http://schemas.microsoft.com/office/powerpoint/2010/main" val="372715865"/>
       </p:ext>
     </p:extLst>
   </p:cSld>
